--- a/code/cnn-pneumonia-medmnist/slides/apresentacao.pptx
+++ b/code/cnn-pneumonia-medmnist/slides/apresentacao.pptx
@@ -2328,7 +2328,7 @@
                 <a:ea typeface="Calibri" pitchFamily="34" charset="-122"/>
                 <a:cs typeface="Calibri" pitchFamily="34" charset="-120"/>
               </a:rPr>
-              <a:t>SEU NOME · Tópicos Avançados em IA</a:t>
+              <a:t>Davi Pires Aquino de Carvalho · UFRPE · Tópicos Avançados em IA</a:t>
             </a:r>
             <a:endParaRPr lang="en-US" sz="1400" dirty="0"/>
           </a:p>
